--- a/Session 2/Slides/Session 2.pptx
+++ b/Session 2/Slides/Session 2.pptx
@@ -284,7 +284,7 @@
           <a:p>
             <a:fld id="{D55DA070-2934-4614-8D9D-0458B30AE12B}" type="datetimeFigureOut">
               <a:rPr lang="en-US" smtClean="0"/>
-              <a:t>11/25/2025</a:t>
+              <a:t>6/30/2026</a:t>
             </a:fld>
             <a:endParaRPr lang="en-US"/>
           </a:p>
@@ -482,7 +482,7 @@
           <a:p>
             <a:fld id="{D55DA070-2934-4614-8D9D-0458B30AE12B}" type="datetimeFigureOut">
               <a:rPr lang="en-US" smtClean="0"/>
-              <a:t>11/25/2025</a:t>
+              <a:t>6/30/2026</a:t>
             </a:fld>
             <a:endParaRPr lang="en-US"/>
           </a:p>
@@ -690,7 +690,7 @@
           <a:p>
             <a:fld id="{D55DA070-2934-4614-8D9D-0458B30AE12B}" type="datetimeFigureOut">
               <a:rPr lang="en-US" smtClean="0"/>
-              <a:t>11/25/2025</a:t>
+              <a:t>6/30/2026</a:t>
             </a:fld>
             <a:endParaRPr lang="en-US"/>
           </a:p>
@@ -888,7 +888,7 @@
           <a:p>
             <a:fld id="{D55DA070-2934-4614-8D9D-0458B30AE12B}" type="datetimeFigureOut">
               <a:rPr lang="en-US" smtClean="0"/>
-              <a:t>11/25/2025</a:t>
+              <a:t>6/30/2026</a:t>
             </a:fld>
             <a:endParaRPr lang="en-US"/>
           </a:p>
@@ -1163,7 +1163,7 @@
           <a:p>
             <a:fld id="{D55DA070-2934-4614-8D9D-0458B30AE12B}" type="datetimeFigureOut">
               <a:rPr lang="en-US" smtClean="0"/>
-              <a:t>11/25/2025</a:t>
+              <a:t>6/30/2026</a:t>
             </a:fld>
             <a:endParaRPr lang="en-US"/>
           </a:p>
@@ -1428,7 +1428,7 @@
           <a:p>
             <a:fld id="{D55DA070-2934-4614-8D9D-0458B30AE12B}" type="datetimeFigureOut">
               <a:rPr lang="en-US" smtClean="0"/>
-              <a:t>11/25/2025</a:t>
+              <a:t>6/30/2026</a:t>
             </a:fld>
             <a:endParaRPr lang="en-US"/>
           </a:p>
@@ -1840,7 +1840,7 @@
           <a:p>
             <a:fld id="{D55DA070-2934-4614-8D9D-0458B30AE12B}" type="datetimeFigureOut">
               <a:rPr lang="en-US" smtClean="0"/>
-              <a:t>11/25/2025</a:t>
+              <a:t>6/30/2026</a:t>
             </a:fld>
             <a:endParaRPr lang="en-US"/>
           </a:p>
@@ -1981,7 +1981,7 @@
           <a:p>
             <a:fld id="{D55DA070-2934-4614-8D9D-0458B30AE12B}" type="datetimeFigureOut">
               <a:rPr lang="en-US" smtClean="0"/>
-              <a:t>11/25/2025</a:t>
+              <a:t>6/30/2026</a:t>
             </a:fld>
             <a:endParaRPr lang="en-US"/>
           </a:p>
@@ -2094,7 +2094,7 @@
           <a:p>
             <a:fld id="{D55DA070-2934-4614-8D9D-0458B30AE12B}" type="datetimeFigureOut">
               <a:rPr lang="en-US" smtClean="0"/>
-              <a:t>11/25/2025</a:t>
+              <a:t>6/30/2026</a:t>
             </a:fld>
             <a:endParaRPr lang="en-US"/>
           </a:p>
@@ -2405,7 +2405,7 @@
           <a:p>
             <a:fld id="{D55DA070-2934-4614-8D9D-0458B30AE12B}" type="datetimeFigureOut">
               <a:rPr lang="en-US" smtClean="0"/>
-              <a:t>11/25/2025</a:t>
+              <a:t>6/30/2026</a:t>
             </a:fld>
             <a:endParaRPr lang="en-US"/>
           </a:p>
@@ -2693,7 +2693,7 @@
           <a:p>
             <a:fld id="{D55DA070-2934-4614-8D9D-0458B30AE12B}" type="datetimeFigureOut">
               <a:rPr lang="en-US" smtClean="0"/>
-              <a:t>11/25/2025</a:t>
+              <a:t>6/30/2026</a:t>
             </a:fld>
             <a:endParaRPr lang="en-US"/>
           </a:p>
@@ -2770,9 +2770,18 @@
 <p:sldMaster xmlns:a="http://schemas.openxmlformats.org/drawingml/2006/main" xmlns:r="http://schemas.openxmlformats.org/officeDocument/2006/relationships" xmlns:p="http://schemas.openxmlformats.org/presentationml/2006/main">
   <p:cSld>
     <p:bg>
-      <p:bgRef idx="1001">
-        <a:schemeClr val="bg1"/>
-      </p:bgRef>
+      <p:bgPr>
+        <a:blipFill dpi="0" rotWithShape="1">
+          <a:blip r:embed="rId13">
+            <a:lum/>
+          </a:blip>
+          <a:srcRect/>
+          <a:stretch>
+            <a:fillRect/>
+          </a:stretch>
+        </a:blipFill>
+        <a:effectLst/>
+      </p:bgPr>
     </p:bg>
     <p:spTree>
       <p:nvGrpSpPr>
@@ -2934,7 +2943,7 @@
           <a:p>
             <a:fld id="{D55DA070-2934-4614-8D9D-0458B30AE12B}" type="datetimeFigureOut">
               <a:rPr lang="en-US" smtClean="0"/>
-              <a:t>11/25/2025</a:t>
+              <a:t>6/30/2026</a:t>
             </a:fld>
             <a:endParaRPr lang="en-US"/>
           </a:p>
@@ -3351,37 +3360,12 @@
           <a:chExt cx="0" cy="0"/>
         </a:xfrm>
       </p:grpSpPr>
-      <p:sp>
-        <p:nvSpPr>
-          <p:cNvPr id="3" name="Subtitle 2">
-            <a:extLst>
-              <a:ext uri="{FF2B5EF4-FFF2-40B4-BE49-F238E27FC236}">
-                <a16:creationId xmlns:a16="http://schemas.microsoft.com/office/drawing/2014/main" id="{5B36F87B-08F8-87ED-A688-565048A3614C}"/>
-              </a:ext>
-            </a:extLst>
-          </p:cNvPr>
-          <p:cNvSpPr>
-            <a:spLocks noGrp="1"/>
-          </p:cNvSpPr>
-          <p:nvPr>
-            <p:ph type="subTitle" idx="1"/>
-          </p:nvPr>
-        </p:nvSpPr>
-        <p:spPr/>
-        <p:txBody>
-          <a:bodyPr/>
-          <a:lstStyle/>
-          <a:p>
-            <a:endParaRPr lang="en-GB"/>
-          </a:p>
-        </p:txBody>
-      </p:sp>
       <p:pic>
         <p:nvPicPr>
-          <p:cNvPr id="5" name="Picture 4" descr="A picture containing screenshot, space, darkness, flight&#10;&#10;Description automatically generated">
-            <a:extLst>
-              <a:ext uri="{FF2B5EF4-FFF2-40B4-BE49-F238E27FC236}">
-                <a16:creationId xmlns:a16="http://schemas.microsoft.com/office/drawing/2014/main" id="{D85C521F-EF14-DF28-0AEB-D7544D24F7EF}"/>
+          <p:cNvPr id="11" name="Picture 10" descr="A red text on a black background&#10;&#10;Description automatically generated with medium confidence">
+            <a:extLst>
+              <a:ext uri="{FF2B5EF4-FFF2-40B4-BE49-F238E27FC236}">
+                <a16:creationId xmlns:a16="http://schemas.microsoft.com/office/drawing/2014/main" id="{8A1CCC7E-6F70-0C85-F260-EEC3D4193FCF}"/>
               </a:ext>
             </a:extLst>
           </p:cNvPr>
@@ -3404,8 +3388,8 @@
         </p:blipFill>
         <p:spPr>
           <a:xfrm>
-            <a:off x="-96253" y="-36094"/>
-            <a:ext cx="12304295" cy="6908842"/>
+            <a:off x="10154653" y="101060"/>
+            <a:ext cx="1913202" cy="1164224"/>
           </a:xfrm>
           <a:prstGeom prst="rect">
             <a:avLst/>
@@ -3414,10 +3398,10 @@
       </p:pic>
       <p:pic>
         <p:nvPicPr>
-          <p:cNvPr id="11" name="Picture 10" descr="A red text on a black background&#10;&#10;Description automatically generated with medium confidence">
-            <a:extLst>
-              <a:ext uri="{FF2B5EF4-FFF2-40B4-BE49-F238E27FC236}">
-                <a16:creationId xmlns:a16="http://schemas.microsoft.com/office/drawing/2014/main" id="{8A1CCC7E-6F70-0C85-F260-EEC3D4193FCF}"/>
+          <p:cNvPr id="8" name="Picture 7">
+            <a:extLst>
+              <a:ext uri="{FF2B5EF4-FFF2-40B4-BE49-F238E27FC236}">
+                <a16:creationId xmlns:a16="http://schemas.microsoft.com/office/drawing/2014/main" id="{96E040BF-C392-052B-5990-6368B148E871}"/>
               </a:ext>
             </a:extLst>
           </p:cNvPr>
@@ -3427,21 +3411,15 @@
           <p:nvPr/>
         </p:nvPicPr>
         <p:blipFill>
-          <a:blip r:embed="rId3" cstate="print">
-            <a:extLst>
-              <a:ext uri="{28A0092B-C50C-407E-A947-70E740481C1C}">
-                <a14:useLocalDpi xmlns:a14="http://schemas.microsoft.com/office/drawing/2010/main" val="0"/>
-              </a:ext>
-            </a:extLst>
-          </a:blip>
+          <a:blip r:embed="rId3"/>
           <a:stretch>
             <a:fillRect/>
           </a:stretch>
         </p:blipFill>
         <p:spPr>
           <a:xfrm>
-            <a:off x="10154653" y="101060"/>
-            <a:ext cx="1913202" cy="1164224"/>
+            <a:off x="772397" y="6235981"/>
+            <a:ext cx="473540" cy="473540"/>
           </a:xfrm>
           <a:prstGeom prst="rect">
             <a:avLst/>
@@ -3450,10 +3428,10 @@
       </p:pic>
       <p:pic>
         <p:nvPicPr>
-          <p:cNvPr id="8" name="Picture 7">
-            <a:extLst>
-              <a:ext uri="{FF2B5EF4-FFF2-40B4-BE49-F238E27FC236}">
-                <a16:creationId xmlns:a16="http://schemas.microsoft.com/office/drawing/2014/main" id="{96E040BF-C392-052B-5990-6368B148E871}"/>
+          <p:cNvPr id="12" name="Picture 11">
+            <a:extLst>
+              <a:ext uri="{FF2B5EF4-FFF2-40B4-BE49-F238E27FC236}">
+                <a16:creationId xmlns:a16="http://schemas.microsoft.com/office/drawing/2014/main" id="{82F6409B-D42C-4D7E-A008-5B653A2362C5}"/>
               </a:ext>
             </a:extLst>
           </p:cNvPr>
@@ -3470,8 +3448,8 @@
         </p:blipFill>
         <p:spPr>
           <a:xfrm>
-            <a:off x="1887764" y="6276175"/>
-            <a:ext cx="473540" cy="473540"/>
+            <a:off x="2047441" y="6235981"/>
+            <a:ext cx="473541" cy="480028"/>
           </a:xfrm>
           <a:prstGeom prst="rect">
             <a:avLst/>
@@ -3480,10 +3458,10 @@
       </p:pic>
       <p:pic>
         <p:nvPicPr>
-          <p:cNvPr id="12" name="Picture 11">
-            <a:extLst>
-              <a:ext uri="{FF2B5EF4-FFF2-40B4-BE49-F238E27FC236}">
-                <a16:creationId xmlns:a16="http://schemas.microsoft.com/office/drawing/2014/main" id="{82F6409B-D42C-4D7E-A008-5B653A2362C5}"/>
+          <p:cNvPr id="2" name="Picture 1">
+            <a:extLst>
+              <a:ext uri="{FF2B5EF4-FFF2-40B4-BE49-F238E27FC236}">
+                <a16:creationId xmlns:a16="http://schemas.microsoft.com/office/drawing/2014/main" id="{D2DBE55D-89D5-EB2E-8EEB-5AFCDE69776B}"/>
               </a:ext>
             </a:extLst>
           </p:cNvPr>
@@ -3500,37 +3478,7 @@
         </p:blipFill>
         <p:spPr>
           <a:xfrm>
-            <a:off x="3162808" y="6276175"/>
-            <a:ext cx="473541" cy="480028"/>
-          </a:xfrm>
-          <a:prstGeom prst="rect">
-            <a:avLst/>
-          </a:prstGeom>
-        </p:spPr>
-      </p:pic>
-      <p:pic>
-        <p:nvPicPr>
-          <p:cNvPr id="2" name="Picture 1">
-            <a:extLst>
-              <a:ext uri="{FF2B5EF4-FFF2-40B4-BE49-F238E27FC236}">
-                <a16:creationId xmlns:a16="http://schemas.microsoft.com/office/drawing/2014/main" id="{D2DBE55D-89D5-EB2E-8EEB-5AFCDE69776B}"/>
-              </a:ext>
-            </a:extLst>
-          </p:cNvPr>
-          <p:cNvPicPr>
-            <a:picLocks noChangeAspect="1"/>
-          </p:cNvPicPr>
-          <p:nvPr/>
-        </p:nvPicPr>
-        <p:blipFill>
-          <a:blip r:embed="rId6"/>
-          <a:stretch>
-            <a:fillRect/>
-          </a:stretch>
-        </p:blipFill>
-        <p:spPr>
-          <a:xfrm>
-            <a:off x="2525286" y="6276175"/>
+            <a:off x="1409919" y="6235981"/>
             <a:ext cx="473540" cy="473540"/>
           </a:xfrm>
           <a:prstGeom prst="rect">
@@ -3553,7 +3501,7 @@
           <p:nvPr/>
         </p:nvPicPr>
         <p:blipFill>
-          <a:blip r:embed="rId7" cstate="print">
+          <a:blip r:embed="rId6" cstate="print">
             <a:extLst>
               <a:ext uri="{28A0092B-C50C-407E-A947-70E740481C1C}">
                 <a14:useLocalDpi xmlns:a14="http://schemas.microsoft.com/office/drawing/2010/main" val="0"/>
@@ -3683,10 +3631,10 @@
       </p:grpSpPr>
       <p:pic>
         <p:nvPicPr>
-          <p:cNvPr id="5" name="Picture 4" descr="A picture containing screenshot, darkness, space, blur">
-            <a:extLst>
-              <a:ext uri="{FF2B5EF4-FFF2-40B4-BE49-F238E27FC236}">
-                <a16:creationId xmlns:a16="http://schemas.microsoft.com/office/drawing/2014/main" id="{91899389-6898-EA77-FD43-435440055E0E}"/>
+          <p:cNvPr id="6" name="Picture 5" descr="A logo with a star and wings&#10;&#10;Description automatically generated with low confidence">
+            <a:extLst>
+              <a:ext uri="{FF2B5EF4-FFF2-40B4-BE49-F238E27FC236}">
+                <a16:creationId xmlns:a16="http://schemas.microsoft.com/office/drawing/2014/main" id="{D877D89D-0065-16CE-B7F9-746F931A429D}"/>
               </a:ext>
             </a:extLst>
           </p:cNvPr>
@@ -3697,42 +3645,6 @@
         </p:nvPicPr>
         <p:blipFill>
           <a:blip r:embed="rId2" cstate="print">
-            <a:extLst>
-              <a:ext uri="{28A0092B-C50C-407E-A947-70E740481C1C}">
-                <a14:useLocalDpi xmlns:a14="http://schemas.microsoft.com/office/drawing/2010/main" val="0"/>
-              </a:ext>
-            </a:extLst>
-          </a:blip>
-          <a:stretch>
-            <a:fillRect/>
-          </a:stretch>
-        </p:blipFill>
-        <p:spPr>
-          <a:xfrm>
-            <a:off x="-64169" y="-64168"/>
-            <a:ext cx="12304295" cy="6978316"/>
-          </a:xfrm>
-          <a:prstGeom prst="rect">
-            <a:avLst/>
-          </a:prstGeom>
-        </p:spPr>
-      </p:pic>
-      <p:pic>
-        <p:nvPicPr>
-          <p:cNvPr id="6" name="Picture 5" descr="A logo with a star and wings&#10;&#10;Description automatically generated with low confidence">
-            <a:extLst>
-              <a:ext uri="{FF2B5EF4-FFF2-40B4-BE49-F238E27FC236}">
-                <a16:creationId xmlns:a16="http://schemas.microsoft.com/office/drawing/2014/main" id="{D877D89D-0065-16CE-B7F9-746F931A429D}"/>
-              </a:ext>
-            </a:extLst>
-          </p:cNvPr>
-          <p:cNvPicPr>
-            <a:picLocks noChangeAspect="1"/>
-          </p:cNvPicPr>
-          <p:nvPr/>
-        </p:nvPicPr>
-        <p:blipFill>
-          <a:blip r:embed="rId3" cstate="print">
             <a:extLst>
               <a:ext uri="{28A0092B-C50C-407E-A947-70E740481C1C}">
                 <a14:useLocalDpi xmlns:a14="http://schemas.microsoft.com/office/drawing/2010/main" val="0"/>
@@ -3808,7 +3720,7 @@
           <p:nvPr/>
         </p:nvPicPr>
         <p:blipFill>
-          <a:blip r:embed="rId4">
+          <a:blip r:embed="rId3">
             <a:extLst>
               <a:ext uri="{28A0092B-C50C-407E-A947-70E740481C1C}">
                 <a14:useLocalDpi xmlns:a14="http://schemas.microsoft.com/office/drawing/2010/main" val="0"/>
@@ -3925,10 +3837,10 @@
       </p:grpSpPr>
       <p:pic>
         <p:nvPicPr>
-          <p:cNvPr id="5" name="Picture 4" descr="A picture containing screenshot, darkness, space, blur">
-            <a:extLst>
-              <a:ext uri="{FF2B5EF4-FFF2-40B4-BE49-F238E27FC236}">
-                <a16:creationId xmlns:a16="http://schemas.microsoft.com/office/drawing/2014/main" id="{9892EDE4-9C47-1D42-3493-AD30ED716765}"/>
+          <p:cNvPr id="6" name="Picture 5" descr="A logo with a star and wings&#10;&#10;Description automatically generated with low confidence">
+            <a:extLst>
+              <a:ext uri="{FF2B5EF4-FFF2-40B4-BE49-F238E27FC236}">
+                <a16:creationId xmlns:a16="http://schemas.microsoft.com/office/drawing/2014/main" id="{A94C03C0-F879-2F04-F2F6-9E249BC604B9}"/>
               </a:ext>
             </a:extLst>
           </p:cNvPr>
@@ -3939,42 +3851,6 @@
         </p:nvPicPr>
         <p:blipFill>
           <a:blip r:embed="rId2" cstate="print">
-            <a:extLst>
-              <a:ext uri="{28A0092B-C50C-407E-A947-70E740481C1C}">
-                <a14:useLocalDpi xmlns:a14="http://schemas.microsoft.com/office/drawing/2010/main" val="0"/>
-              </a:ext>
-            </a:extLst>
-          </a:blip>
-          <a:stretch>
-            <a:fillRect/>
-          </a:stretch>
-        </p:blipFill>
-        <p:spPr>
-          <a:xfrm>
-            <a:off x="-64169" y="-64168"/>
-            <a:ext cx="12304295" cy="6978316"/>
-          </a:xfrm>
-          <a:prstGeom prst="rect">
-            <a:avLst/>
-          </a:prstGeom>
-        </p:spPr>
-      </p:pic>
-      <p:pic>
-        <p:nvPicPr>
-          <p:cNvPr id="6" name="Picture 5" descr="A logo with a star and wings&#10;&#10;Description automatically generated with low confidence">
-            <a:extLst>
-              <a:ext uri="{FF2B5EF4-FFF2-40B4-BE49-F238E27FC236}">
-                <a16:creationId xmlns:a16="http://schemas.microsoft.com/office/drawing/2014/main" id="{A94C03C0-F879-2F04-F2F6-9E249BC604B9}"/>
-              </a:ext>
-            </a:extLst>
-          </p:cNvPr>
-          <p:cNvPicPr>
-            <a:picLocks noChangeAspect="1"/>
-          </p:cNvPicPr>
-          <p:nvPr/>
-        </p:nvPicPr>
-        <p:blipFill>
-          <a:blip r:embed="rId3" cstate="print">
             <a:extLst>
               <a:ext uri="{28A0092B-C50C-407E-A947-70E740481C1C}">
                 <a14:useLocalDpi xmlns:a14="http://schemas.microsoft.com/office/drawing/2010/main" val="0"/>
@@ -4050,7 +3926,7 @@
           <p:nvPr/>
         </p:nvPicPr>
         <p:blipFill>
-          <a:blip r:embed="rId4">
+          <a:blip r:embed="rId3">
             <a:extLst>
               <a:ext uri="{28A0092B-C50C-407E-A947-70E740481C1C}">
                 <a14:useLocalDpi xmlns:a14="http://schemas.microsoft.com/office/drawing/2010/main" val="0"/>
@@ -4167,10 +4043,10 @@
       </p:grpSpPr>
       <p:pic>
         <p:nvPicPr>
-          <p:cNvPr id="5" name="Picture 4" descr="A picture containing screenshot, darkness, space, blur">
-            <a:extLst>
-              <a:ext uri="{FF2B5EF4-FFF2-40B4-BE49-F238E27FC236}">
-                <a16:creationId xmlns:a16="http://schemas.microsoft.com/office/drawing/2014/main" id="{702FE12A-CEF7-00EE-B5F1-AD45C739EEF6}"/>
+          <p:cNvPr id="6" name="Picture 5" descr="A logo with a star and wings&#10;&#10;Description automatically generated with low confidence">
+            <a:extLst>
+              <a:ext uri="{FF2B5EF4-FFF2-40B4-BE49-F238E27FC236}">
+                <a16:creationId xmlns:a16="http://schemas.microsoft.com/office/drawing/2014/main" id="{4E62B4BF-DE67-EC26-B140-EC247FE3818A}"/>
               </a:ext>
             </a:extLst>
           </p:cNvPr>
@@ -4181,42 +4057,6 @@
         </p:nvPicPr>
         <p:blipFill>
           <a:blip r:embed="rId2" cstate="print">
-            <a:extLst>
-              <a:ext uri="{28A0092B-C50C-407E-A947-70E740481C1C}">
-                <a14:useLocalDpi xmlns:a14="http://schemas.microsoft.com/office/drawing/2010/main" val="0"/>
-              </a:ext>
-            </a:extLst>
-          </a:blip>
-          <a:stretch>
-            <a:fillRect/>
-          </a:stretch>
-        </p:blipFill>
-        <p:spPr>
-          <a:xfrm>
-            <a:off x="-64169" y="-64168"/>
-            <a:ext cx="12304295" cy="6978316"/>
-          </a:xfrm>
-          <a:prstGeom prst="rect">
-            <a:avLst/>
-          </a:prstGeom>
-        </p:spPr>
-      </p:pic>
-      <p:pic>
-        <p:nvPicPr>
-          <p:cNvPr id="6" name="Picture 5" descr="A logo with a star and wings&#10;&#10;Description automatically generated with low confidence">
-            <a:extLst>
-              <a:ext uri="{FF2B5EF4-FFF2-40B4-BE49-F238E27FC236}">
-                <a16:creationId xmlns:a16="http://schemas.microsoft.com/office/drawing/2014/main" id="{4E62B4BF-DE67-EC26-B140-EC247FE3818A}"/>
-              </a:ext>
-            </a:extLst>
-          </p:cNvPr>
-          <p:cNvPicPr>
-            <a:picLocks noChangeAspect="1"/>
-          </p:cNvPicPr>
-          <p:nvPr/>
-        </p:nvPicPr>
-        <p:blipFill>
-          <a:blip r:embed="rId3" cstate="print">
             <a:extLst>
               <a:ext uri="{28A0092B-C50C-407E-A947-70E740481C1C}">
                 <a14:useLocalDpi xmlns:a14="http://schemas.microsoft.com/office/drawing/2010/main" val="0"/>
@@ -4335,7 +4175,7 @@
           <p:nvPr/>
         </p:nvPicPr>
         <p:blipFill>
-          <a:blip r:embed="rId4">
+          <a:blip r:embed="rId3">
             <a:extLst>
               <a:ext uri="{28A0092B-C50C-407E-A947-70E740481C1C}">
                 <a14:useLocalDpi xmlns:a14="http://schemas.microsoft.com/office/drawing/2010/main" val="0"/>
@@ -4452,10 +4292,10 @@
       </p:grpSpPr>
       <p:pic>
         <p:nvPicPr>
-          <p:cNvPr id="5" name="Picture 4" descr="A picture containing screenshot, darkness, space, blur">
-            <a:extLst>
-              <a:ext uri="{FF2B5EF4-FFF2-40B4-BE49-F238E27FC236}">
-                <a16:creationId xmlns:a16="http://schemas.microsoft.com/office/drawing/2014/main" id="{DFFDB169-271A-378D-5530-48242B96D1B8}"/>
+          <p:cNvPr id="6" name="Picture 5" descr="A logo with a star and wings&#10;&#10;Description automatically generated with low confidence">
+            <a:extLst>
+              <a:ext uri="{FF2B5EF4-FFF2-40B4-BE49-F238E27FC236}">
+                <a16:creationId xmlns:a16="http://schemas.microsoft.com/office/drawing/2014/main" id="{9F8D18F0-1A09-2DC4-8AE5-A82AB2AA913E}"/>
               </a:ext>
             </a:extLst>
           </p:cNvPr>
@@ -4466,42 +4306,6 @@
         </p:nvPicPr>
         <p:blipFill>
           <a:blip r:embed="rId2" cstate="print">
-            <a:extLst>
-              <a:ext uri="{28A0092B-C50C-407E-A947-70E740481C1C}">
-                <a14:useLocalDpi xmlns:a14="http://schemas.microsoft.com/office/drawing/2010/main" val="0"/>
-              </a:ext>
-            </a:extLst>
-          </a:blip>
-          <a:stretch>
-            <a:fillRect/>
-          </a:stretch>
-        </p:blipFill>
-        <p:spPr>
-          <a:xfrm>
-            <a:off x="-64169" y="-64168"/>
-            <a:ext cx="12304295" cy="6978316"/>
-          </a:xfrm>
-          <a:prstGeom prst="rect">
-            <a:avLst/>
-          </a:prstGeom>
-        </p:spPr>
-      </p:pic>
-      <p:pic>
-        <p:nvPicPr>
-          <p:cNvPr id="6" name="Picture 5" descr="A logo with a star and wings&#10;&#10;Description automatically generated with low confidence">
-            <a:extLst>
-              <a:ext uri="{FF2B5EF4-FFF2-40B4-BE49-F238E27FC236}">
-                <a16:creationId xmlns:a16="http://schemas.microsoft.com/office/drawing/2014/main" id="{9F8D18F0-1A09-2DC4-8AE5-A82AB2AA913E}"/>
-              </a:ext>
-            </a:extLst>
-          </p:cNvPr>
-          <p:cNvPicPr>
-            <a:picLocks noChangeAspect="1"/>
-          </p:cNvPicPr>
-          <p:nvPr/>
-        </p:nvPicPr>
-        <p:blipFill>
-          <a:blip r:embed="rId3" cstate="print">
             <a:extLst>
               <a:ext uri="{28A0092B-C50C-407E-A947-70E740481C1C}">
                 <a14:useLocalDpi xmlns:a14="http://schemas.microsoft.com/office/drawing/2010/main" val="0"/>
@@ -4577,7 +4381,7 @@
           <p:nvPr/>
         </p:nvPicPr>
         <p:blipFill>
-          <a:blip r:embed="rId4">
+          <a:blip r:embed="rId3">
             <a:extLst>
               <a:ext uri="{28A0092B-C50C-407E-A947-70E740481C1C}">
                 <a14:useLocalDpi xmlns:a14="http://schemas.microsoft.com/office/drawing/2010/main" val="0"/>
@@ -4689,10 +4493,10 @@
       </p:grpSpPr>
       <p:pic>
         <p:nvPicPr>
-          <p:cNvPr id="5" name="Picture 4" descr="A picture containing screenshot, darkness, space, blur">
-            <a:extLst>
-              <a:ext uri="{FF2B5EF4-FFF2-40B4-BE49-F238E27FC236}">
-                <a16:creationId xmlns:a16="http://schemas.microsoft.com/office/drawing/2014/main" id="{F9EBE9A8-F80B-7706-C222-E9EFC8019FE6}"/>
+          <p:cNvPr id="6" name="Picture 5" descr="A logo with a star and wings&#10;&#10;Description automatically generated with low confidence">
+            <a:extLst>
+              <a:ext uri="{FF2B5EF4-FFF2-40B4-BE49-F238E27FC236}">
+                <a16:creationId xmlns:a16="http://schemas.microsoft.com/office/drawing/2014/main" id="{070CE1CA-18EF-7CCF-A5C7-E4BF55542291}"/>
               </a:ext>
             </a:extLst>
           </p:cNvPr>
@@ -4703,42 +4507,6 @@
         </p:nvPicPr>
         <p:blipFill>
           <a:blip r:embed="rId2" cstate="print">
-            <a:extLst>
-              <a:ext uri="{28A0092B-C50C-407E-A947-70E740481C1C}">
-                <a14:useLocalDpi xmlns:a14="http://schemas.microsoft.com/office/drawing/2010/main" val="0"/>
-              </a:ext>
-            </a:extLst>
-          </a:blip>
-          <a:stretch>
-            <a:fillRect/>
-          </a:stretch>
-        </p:blipFill>
-        <p:spPr>
-          <a:xfrm>
-            <a:off x="-64169" y="-64168"/>
-            <a:ext cx="12304295" cy="6978316"/>
-          </a:xfrm>
-          <a:prstGeom prst="rect">
-            <a:avLst/>
-          </a:prstGeom>
-        </p:spPr>
-      </p:pic>
-      <p:pic>
-        <p:nvPicPr>
-          <p:cNvPr id="6" name="Picture 5" descr="A logo with a star and wings&#10;&#10;Description automatically generated with low confidence">
-            <a:extLst>
-              <a:ext uri="{FF2B5EF4-FFF2-40B4-BE49-F238E27FC236}">
-                <a16:creationId xmlns:a16="http://schemas.microsoft.com/office/drawing/2014/main" id="{070CE1CA-18EF-7CCF-A5C7-E4BF55542291}"/>
-              </a:ext>
-            </a:extLst>
-          </p:cNvPr>
-          <p:cNvPicPr>
-            <a:picLocks noChangeAspect="1"/>
-          </p:cNvPicPr>
-          <p:nvPr/>
-        </p:nvPicPr>
-        <p:blipFill>
-          <a:blip r:embed="rId3" cstate="print">
             <a:extLst>
               <a:ext uri="{28A0092B-C50C-407E-A947-70E740481C1C}">
                 <a14:useLocalDpi xmlns:a14="http://schemas.microsoft.com/office/drawing/2010/main" val="0"/>
@@ -4897,7 +4665,7 @@
           <p:nvPr/>
         </p:nvPicPr>
         <p:blipFill>
-          <a:blip r:embed="rId4">
+          <a:blip r:embed="rId3">
             <a:extLst>
               <a:ext uri="{28A0092B-C50C-407E-A947-70E740481C1C}">
                 <a14:useLocalDpi xmlns:a14="http://schemas.microsoft.com/office/drawing/2010/main" val="0"/>
@@ -4968,10 +4736,10 @@
       </p:grpSpPr>
       <p:pic>
         <p:nvPicPr>
-          <p:cNvPr id="5" name="Picture 4" descr="A picture containing screenshot, darkness, space, blur">
-            <a:extLst>
-              <a:ext uri="{FF2B5EF4-FFF2-40B4-BE49-F238E27FC236}">
-                <a16:creationId xmlns:a16="http://schemas.microsoft.com/office/drawing/2014/main" id="{9AEFD6C5-FDC1-F84C-C785-059F551C98AB}"/>
+          <p:cNvPr id="6" name="Picture 5" descr="A logo with a star and wings&#10;&#10;Description automatically generated with low confidence">
+            <a:extLst>
+              <a:ext uri="{FF2B5EF4-FFF2-40B4-BE49-F238E27FC236}">
+                <a16:creationId xmlns:a16="http://schemas.microsoft.com/office/drawing/2014/main" id="{7E9EC809-02F0-1947-6C89-45D863BD6117}"/>
               </a:ext>
             </a:extLst>
           </p:cNvPr>
@@ -4982,42 +4750,6 @@
         </p:nvPicPr>
         <p:blipFill>
           <a:blip r:embed="rId2" cstate="print">
-            <a:extLst>
-              <a:ext uri="{28A0092B-C50C-407E-A947-70E740481C1C}">
-                <a14:useLocalDpi xmlns:a14="http://schemas.microsoft.com/office/drawing/2010/main" val="0"/>
-              </a:ext>
-            </a:extLst>
-          </a:blip>
-          <a:stretch>
-            <a:fillRect/>
-          </a:stretch>
-        </p:blipFill>
-        <p:spPr>
-          <a:xfrm>
-            <a:off x="-64169" y="-64168"/>
-            <a:ext cx="12304295" cy="6978316"/>
-          </a:xfrm>
-          <a:prstGeom prst="rect">
-            <a:avLst/>
-          </a:prstGeom>
-        </p:spPr>
-      </p:pic>
-      <p:pic>
-        <p:nvPicPr>
-          <p:cNvPr id="6" name="Picture 5" descr="A logo with a star and wings&#10;&#10;Description automatically generated with low confidence">
-            <a:extLst>
-              <a:ext uri="{FF2B5EF4-FFF2-40B4-BE49-F238E27FC236}">
-                <a16:creationId xmlns:a16="http://schemas.microsoft.com/office/drawing/2014/main" id="{7E9EC809-02F0-1947-6C89-45D863BD6117}"/>
-              </a:ext>
-            </a:extLst>
-          </p:cNvPr>
-          <p:cNvPicPr>
-            <a:picLocks noChangeAspect="1"/>
-          </p:cNvPicPr>
-          <p:nvPr/>
-        </p:nvPicPr>
-        <p:blipFill>
-          <a:blip r:embed="rId3" cstate="print">
             <a:extLst>
               <a:ext uri="{28A0092B-C50C-407E-A947-70E740481C1C}">
                 <a14:useLocalDpi xmlns:a14="http://schemas.microsoft.com/office/drawing/2010/main" val="0"/>
@@ -5176,7 +4908,7 @@
           <p:nvPr/>
         </p:nvPicPr>
         <p:blipFill>
-          <a:blip r:embed="rId4">
+          <a:blip r:embed="rId3">
             <a:extLst>
               <a:ext uri="{28A0092B-C50C-407E-A947-70E740481C1C}">
                 <a14:useLocalDpi xmlns:a14="http://schemas.microsoft.com/office/drawing/2010/main" val="0"/>
@@ -5247,10 +4979,10 @@
       </p:grpSpPr>
       <p:pic>
         <p:nvPicPr>
-          <p:cNvPr id="5" name="Picture 4" descr="A picture containing screenshot, darkness, space, blur">
-            <a:extLst>
-              <a:ext uri="{FF2B5EF4-FFF2-40B4-BE49-F238E27FC236}">
-                <a16:creationId xmlns:a16="http://schemas.microsoft.com/office/drawing/2014/main" id="{B151C1F6-1D39-5834-FE0C-F887785E706A}"/>
+          <p:cNvPr id="6" name="Picture 5" descr="A logo with a star and wings&#10;&#10;Description automatically generated with low confidence">
+            <a:extLst>
+              <a:ext uri="{FF2B5EF4-FFF2-40B4-BE49-F238E27FC236}">
+                <a16:creationId xmlns:a16="http://schemas.microsoft.com/office/drawing/2014/main" id="{74645DF1-E8DB-9683-0495-5AA13B6A05C7}"/>
               </a:ext>
             </a:extLst>
           </p:cNvPr>
@@ -5261,42 +4993,6 @@
         </p:nvPicPr>
         <p:blipFill>
           <a:blip r:embed="rId2" cstate="print">
-            <a:extLst>
-              <a:ext uri="{28A0092B-C50C-407E-A947-70E740481C1C}">
-                <a14:useLocalDpi xmlns:a14="http://schemas.microsoft.com/office/drawing/2010/main" val="0"/>
-              </a:ext>
-            </a:extLst>
-          </a:blip>
-          <a:stretch>
-            <a:fillRect/>
-          </a:stretch>
-        </p:blipFill>
-        <p:spPr>
-          <a:xfrm>
-            <a:off x="-64169" y="-64168"/>
-            <a:ext cx="12304295" cy="6978316"/>
-          </a:xfrm>
-          <a:prstGeom prst="rect">
-            <a:avLst/>
-          </a:prstGeom>
-        </p:spPr>
-      </p:pic>
-      <p:pic>
-        <p:nvPicPr>
-          <p:cNvPr id="6" name="Picture 5" descr="A logo with a star and wings&#10;&#10;Description automatically generated with low confidence">
-            <a:extLst>
-              <a:ext uri="{FF2B5EF4-FFF2-40B4-BE49-F238E27FC236}">
-                <a16:creationId xmlns:a16="http://schemas.microsoft.com/office/drawing/2014/main" id="{74645DF1-E8DB-9683-0495-5AA13B6A05C7}"/>
-              </a:ext>
-            </a:extLst>
-          </p:cNvPr>
-          <p:cNvPicPr>
-            <a:picLocks noChangeAspect="1"/>
-          </p:cNvPicPr>
-          <p:nvPr/>
-        </p:nvPicPr>
-        <p:blipFill>
-          <a:blip r:embed="rId3" cstate="print">
             <a:extLst>
               <a:ext uri="{28A0092B-C50C-407E-A947-70E740481C1C}">
                 <a14:useLocalDpi xmlns:a14="http://schemas.microsoft.com/office/drawing/2010/main" val="0"/>
@@ -5455,7 +5151,7 @@
           <p:nvPr/>
         </p:nvPicPr>
         <p:blipFill>
-          <a:blip r:embed="rId4">
+          <a:blip r:embed="rId3">
             <a:extLst>
               <a:ext uri="{28A0092B-C50C-407E-A947-70E740481C1C}">
                 <a14:useLocalDpi xmlns:a14="http://schemas.microsoft.com/office/drawing/2010/main" val="0"/>
@@ -5526,10 +5222,10 @@
       </p:grpSpPr>
       <p:pic>
         <p:nvPicPr>
-          <p:cNvPr id="5" name="Picture 4" descr="A picture containing screenshot, darkness, space, blur">
-            <a:extLst>
-              <a:ext uri="{FF2B5EF4-FFF2-40B4-BE49-F238E27FC236}">
-                <a16:creationId xmlns:a16="http://schemas.microsoft.com/office/drawing/2014/main" id="{4046A48C-889E-E622-744E-CA91ED584EF7}"/>
+          <p:cNvPr id="6" name="Picture 5" descr="A logo with a star and wings&#10;&#10;Description automatically generated with low confidence">
+            <a:extLst>
+              <a:ext uri="{FF2B5EF4-FFF2-40B4-BE49-F238E27FC236}">
+                <a16:creationId xmlns:a16="http://schemas.microsoft.com/office/drawing/2014/main" id="{8DB3E87F-A735-0DE8-8FC2-E8039F09DEB8}"/>
               </a:ext>
             </a:extLst>
           </p:cNvPr>
@@ -5540,42 +5236,6 @@
         </p:nvPicPr>
         <p:blipFill>
           <a:blip r:embed="rId2" cstate="print">
-            <a:extLst>
-              <a:ext uri="{28A0092B-C50C-407E-A947-70E740481C1C}">
-                <a14:useLocalDpi xmlns:a14="http://schemas.microsoft.com/office/drawing/2010/main" val="0"/>
-              </a:ext>
-            </a:extLst>
-          </a:blip>
-          <a:stretch>
-            <a:fillRect/>
-          </a:stretch>
-        </p:blipFill>
-        <p:spPr>
-          <a:xfrm>
-            <a:off x="-64169" y="-64168"/>
-            <a:ext cx="12304295" cy="6978316"/>
-          </a:xfrm>
-          <a:prstGeom prst="rect">
-            <a:avLst/>
-          </a:prstGeom>
-        </p:spPr>
-      </p:pic>
-      <p:pic>
-        <p:nvPicPr>
-          <p:cNvPr id="6" name="Picture 5" descr="A logo with a star and wings&#10;&#10;Description automatically generated with low confidence">
-            <a:extLst>
-              <a:ext uri="{FF2B5EF4-FFF2-40B4-BE49-F238E27FC236}">
-                <a16:creationId xmlns:a16="http://schemas.microsoft.com/office/drawing/2014/main" id="{8DB3E87F-A735-0DE8-8FC2-E8039F09DEB8}"/>
-              </a:ext>
-            </a:extLst>
-          </p:cNvPr>
-          <p:cNvPicPr>
-            <a:picLocks noChangeAspect="1"/>
-          </p:cNvPicPr>
-          <p:nvPr/>
-        </p:nvPicPr>
-        <p:blipFill>
-          <a:blip r:embed="rId3" cstate="print">
             <a:extLst>
               <a:ext uri="{28A0092B-C50C-407E-A947-70E740481C1C}">
                 <a14:useLocalDpi xmlns:a14="http://schemas.microsoft.com/office/drawing/2010/main" val="0"/>
@@ -5734,7 +5394,7 @@
           <p:nvPr/>
         </p:nvPicPr>
         <p:blipFill>
-          <a:blip r:embed="rId4">
+          <a:blip r:embed="rId3">
             <a:extLst>
               <a:ext uri="{28A0092B-C50C-407E-A947-70E740481C1C}">
                 <a14:useLocalDpi xmlns:a14="http://schemas.microsoft.com/office/drawing/2010/main" val="0"/>
@@ -5806,10 +5466,10 @@
       </p:grpSpPr>
       <p:pic>
         <p:nvPicPr>
-          <p:cNvPr id="5" name="Picture 4" descr="A picture containing screenshot, darkness, space, blur">
-            <a:extLst>
-              <a:ext uri="{FF2B5EF4-FFF2-40B4-BE49-F238E27FC236}">
-                <a16:creationId xmlns:a16="http://schemas.microsoft.com/office/drawing/2014/main" id="{1DF385FA-B543-C6A4-5666-FC8F42EAAFE6}"/>
+          <p:cNvPr id="6" name="Picture 5" descr="A logo with a star and wings&#10;&#10;Description automatically generated with low confidence">
+            <a:extLst>
+              <a:ext uri="{FF2B5EF4-FFF2-40B4-BE49-F238E27FC236}">
+                <a16:creationId xmlns:a16="http://schemas.microsoft.com/office/drawing/2014/main" id="{9E3C983D-DD45-CDC7-7F4F-4D05A997AC89}"/>
               </a:ext>
             </a:extLst>
           </p:cNvPr>
@@ -5820,42 +5480,6 @@
         </p:nvPicPr>
         <p:blipFill>
           <a:blip r:embed="rId2" cstate="print">
-            <a:extLst>
-              <a:ext uri="{28A0092B-C50C-407E-A947-70E740481C1C}">
-                <a14:useLocalDpi xmlns:a14="http://schemas.microsoft.com/office/drawing/2010/main" val="0"/>
-              </a:ext>
-            </a:extLst>
-          </a:blip>
-          <a:stretch>
-            <a:fillRect/>
-          </a:stretch>
-        </p:blipFill>
-        <p:spPr>
-          <a:xfrm>
-            <a:off x="-64169" y="-64168"/>
-            <a:ext cx="12304295" cy="6978316"/>
-          </a:xfrm>
-          <a:prstGeom prst="rect">
-            <a:avLst/>
-          </a:prstGeom>
-        </p:spPr>
-      </p:pic>
-      <p:pic>
-        <p:nvPicPr>
-          <p:cNvPr id="6" name="Picture 5" descr="A logo with a star and wings&#10;&#10;Description automatically generated with low confidence">
-            <a:extLst>
-              <a:ext uri="{FF2B5EF4-FFF2-40B4-BE49-F238E27FC236}">
-                <a16:creationId xmlns:a16="http://schemas.microsoft.com/office/drawing/2014/main" id="{9E3C983D-DD45-CDC7-7F4F-4D05A997AC89}"/>
-              </a:ext>
-            </a:extLst>
-          </p:cNvPr>
-          <p:cNvPicPr>
-            <a:picLocks noChangeAspect="1"/>
-          </p:cNvPicPr>
-          <p:nvPr/>
-        </p:nvPicPr>
-        <p:blipFill>
-          <a:blip r:embed="rId3" cstate="print">
             <a:extLst>
               <a:ext uri="{28A0092B-C50C-407E-A947-70E740481C1C}">
                 <a14:useLocalDpi xmlns:a14="http://schemas.microsoft.com/office/drawing/2010/main" val="0"/>
@@ -6039,7 +5663,7 @@
           <p:nvPr/>
         </p:nvPicPr>
         <p:blipFill>
-          <a:blip r:embed="rId4">
+          <a:blip r:embed="rId3">
             <a:extLst>
               <a:ext uri="{28A0092B-C50C-407E-A947-70E740481C1C}">
                 <a14:useLocalDpi xmlns:a14="http://schemas.microsoft.com/office/drawing/2010/main" val="0"/>
@@ -6111,10 +5735,10 @@
       </p:grpSpPr>
       <p:pic>
         <p:nvPicPr>
-          <p:cNvPr id="5" name="Picture 4" descr="A picture containing screenshot, darkness, space, blur">
-            <a:extLst>
-              <a:ext uri="{FF2B5EF4-FFF2-40B4-BE49-F238E27FC236}">
-                <a16:creationId xmlns:a16="http://schemas.microsoft.com/office/drawing/2014/main" id="{DBE5FA83-55F4-9910-3993-61E67F432410}"/>
+          <p:cNvPr id="6" name="Picture 5" descr="A logo with a star and wings&#10;&#10;Description automatically generated with low confidence">
+            <a:extLst>
+              <a:ext uri="{FF2B5EF4-FFF2-40B4-BE49-F238E27FC236}">
+                <a16:creationId xmlns:a16="http://schemas.microsoft.com/office/drawing/2014/main" id="{24B1345F-2A26-615A-AB70-7F921BD02DF1}"/>
               </a:ext>
             </a:extLst>
           </p:cNvPr>
@@ -6125,42 +5749,6 @@
         </p:nvPicPr>
         <p:blipFill>
           <a:blip r:embed="rId2" cstate="print">
-            <a:extLst>
-              <a:ext uri="{28A0092B-C50C-407E-A947-70E740481C1C}">
-                <a14:useLocalDpi xmlns:a14="http://schemas.microsoft.com/office/drawing/2010/main" val="0"/>
-              </a:ext>
-            </a:extLst>
-          </a:blip>
-          <a:stretch>
-            <a:fillRect/>
-          </a:stretch>
-        </p:blipFill>
-        <p:spPr>
-          <a:xfrm>
-            <a:off x="-64169" y="-64168"/>
-            <a:ext cx="12304295" cy="6978316"/>
-          </a:xfrm>
-          <a:prstGeom prst="rect">
-            <a:avLst/>
-          </a:prstGeom>
-        </p:spPr>
-      </p:pic>
-      <p:pic>
-        <p:nvPicPr>
-          <p:cNvPr id="6" name="Picture 5" descr="A logo with a star and wings&#10;&#10;Description automatically generated with low confidence">
-            <a:extLst>
-              <a:ext uri="{FF2B5EF4-FFF2-40B4-BE49-F238E27FC236}">
-                <a16:creationId xmlns:a16="http://schemas.microsoft.com/office/drawing/2014/main" id="{24B1345F-2A26-615A-AB70-7F921BD02DF1}"/>
-              </a:ext>
-            </a:extLst>
-          </p:cNvPr>
-          <p:cNvPicPr>
-            <a:picLocks noChangeAspect="1"/>
-          </p:cNvPicPr>
-          <p:nvPr/>
-        </p:nvPicPr>
-        <p:blipFill>
-          <a:blip r:embed="rId3" cstate="print">
             <a:extLst>
               <a:ext uri="{28A0092B-C50C-407E-A947-70E740481C1C}">
                 <a14:useLocalDpi xmlns:a14="http://schemas.microsoft.com/office/drawing/2010/main" val="0"/>
@@ -6344,7 +5932,7 @@
           <p:nvPr/>
         </p:nvPicPr>
         <p:blipFill>
-          <a:blip r:embed="rId4">
+          <a:blip r:embed="rId3">
             <a:extLst>
               <a:ext uri="{28A0092B-C50C-407E-A947-70E740481C1C}">
                 <a14:useLocalDpi xmlns:a14="http://schemas.microsoft.com/office/drawing/2010/main" val="0"/>
@@ -6416,10 +6004,10 @@
       </p:grpSpPr>
       <p:pic>
         <p:nvPicPr>
-          <p:cNvPr id="5" name="Picture 4" descr="A picture containing screenshot, darkness, space, blur">
-            <a:extLst>
-              <a:ext uri="{FF2B5EF4-FFF2-40B4-BE49-F238E27FC236}">
-                <a16:creationId xmlns:a16="http://schemas.microsoft.com/office/drawing/2014/main" id="{4A58BABB-4D76-9397-40E5-A43422F6ACA5}"/>
+          <p:cNvPr id="6" name="Picture 5" descr="A logo with a star and wings&#10;&#10;Description automatically generated with low confidence">
+            <a:extLst>
+              <a:ext uri="{FF2B5EF4-FFF2-40B4-BE49-F238E27FC236}">
+                <a16:creationId xmlns:a16="http://schemas.microsoft.com/office/drawing/2014/main" id="{ACE80423-3437-84C2-6E7A-321813DDF0DF}"/>
               </a:ext>
             </a:extLst>
           </p:cNvPr>
@@ -6430,42 +6018,6 @@
         </p:nvPicPr>
         <p:blipFill>
           <a:blip r:embed="rId2" cstate="print">
-            <a:extLst>
-              <a:ext uri="{28A0092B-C50C-407E-A947-70E740481C1C}">
-                <a14:useLocalDpi xmlns:a14="http://schemas.microsoft.com/office/drawing/2010/main" val="0"/>
-              </a:ext>
-            </a:extLst>
-          </a:blip>
-          <a:stretch>
-            <a:fillRect/>
-          </a:stretch>
-        </p:blipFill>
-        <p:spPr>
-          <a:xfrm>
-            <a:off x="-64169" y="-64168"/>
-            <a:ext cx="12304295" cy="6978316"/>
-          </a:xfrm>
-          <a:prstGeom prst="rect">
-            <a:avLst/>
-          </a:prstGeom>
-        </p:spPr>
-      </p:pic>
-      <p:pic>
-        <p:nvPicPr>
-          <p:cNvPr id="6" name="Picture 5" descr="A logo with a star and wings&#10;&#10;Description automatically generated with low confidence">
-            <a:extLst>
-              <a:ext uri="{FF2B5EF4-FFF2-40B4-BE49-F238E27FC236}">
-                <a16:creationId xmlns:a16="http://schemas.microsoft.com/office/drawing/2014/main" id="{ACE80423-3437-84C2-6E7A-321813DDF0DF}"/>
-              </a:ext>
-            </a:extLst>
-          </p:cNvPr>
-          <p:cNvPicPr>
-            <a:picLocks noChangeAspect="1"/>
-          </p:cNvPicPr>
-          <p:nvPr/>
-        </p:nvPicPr>
-        <p:blipFill>
-          <a:blip r:embed="rId3" cstate="print">
             <a:extLst>
               <a:ext uri="{28A0092B-C50C-407E-A947-70E740481C1C}">
                 <a14:useLocalDpi xmlns:a14="http://schemas.microsoft.com/office/drawing/2010/main" val="0"/>
@@ -6634,10 +6186,10 @@
       </p:grpSpPr>
       <p:pic>
         <p:nvPicPr>
-          <p:cNvPr id="5" name="Picture 4" descr="A picture containing screenshot, darkness, space, blur">
-            <a:extLst>
-              <a:ext uri="{FF2B5EF4-FFF2-40B4-BE49-F238E27FC236}">
-                <a16:creationId xmlns:a16="http://schemas.microsoft.com/office/drawing/2014/main" id="{FE97441D-C4D2-7F49-6F36-A866F40BAB69}"/>
+          <p:cNvPr id="6" name="Picture 5" descr="A logo with a star and wings&#10;&#10;Description automatically generated with low confidence">
+            <a:extLst>
+              <a:ext uri="{FF2B5EF4-FFF2-40B4-BE49-F238E27FC236}">
+                <a16:creationId xmlns:a16="http://schemas.microsoft.com/office/drawing/2014/main" id="{811B1494-2DD7-78B1-75A5-FA99A357B894}"/>
               </a:ext>
             </a:extLst>
           </p:cNvPr>
@@ -6648,42 +6200,6 @@
         </p:nvPicPr>
         <p:blipFill>
           <a:blip r:embed="rId2" cstate="print">
-            <a:extLst>
-              <a:ext uri="{28A0092B-C50C-407E-A947-70E740481C1C}">
-                <a14:useLocalDpi xmlns:a14="http://schemas.microsoft.com/office/drawing/2010/main" val="0"/>
-              </a:ext>
-            </a:extLst>
-          </a:blip>
-          <a:stretch>
-            <a:fillRect/>
-          </a:stretch>
-        </p:blipFill>
-        <p:spPr>
-          <a:xfrm>
-            <a:off x="-64169" y="-64168"/>
-            <a:ext cx="12304295" cy="6978316"/>
-          </a:xfrm>
-          <a:prstGeom prst="rect">
-            <a:avLst/>
-          </a:prstGeom>
-        </p:spPr>
-      </p:pic>
-      <p:pic>
-        <p:nvPicPr>
-          <p:cNvPr id="6" name="Picture 5" descr="A logo with a star and wings&#10;&#10;Description automatically generated with low confidence">
-            <a:extLst>
-              <a:ext uri="{FF2B5EF4-FFF2-40B4-BE49-F238E27FC236}">
-                <a16:creationId xmlns:a16="http://schemas.microsoft.com/office/drawing/2014/main" id="{811B1494-2DD7-78B1-75A5-FA99A357B894}"/>
-              </a:ext>
-            </a:extLst>
-          </p:cNvPr>
-          <p:cNvPicPr>
-            <a:picLocks noChangeAspect="1"/>
-          </p:cNvPicPr>
-          <p:nvPr/>
-        </p:nvPicPr>
-        <p:blipFill>
-          <a:blip r:embed="rId3" cstate="print">
             <a:extLst>
               <a:ext uri="{28A0092B-C50C-407E-A947-70E740481C1C}">
                 <a14:useLocalDpi xmlns:a14="http://schemas.microsoft.com/office/drawing/2010/main" val="0"/>
@@ -6759,7 +6275,7 @@
           <p:nvPr/>
         </p:nvPicPr>
         <p:blipFill>
-          <a:blip r:embed="rId4">
+          <a:blip r:embed="rId3">
             <a:extLst>
               <a:ext uri="{28A0092B-C50C-407E-A947-70E740481C1C}">
                 <a14:useLocalDpi xmlns:a14="http://schemas.microsoft.com/office/drawing/2010/main" val="0"/>
@@ -6871,10 +6387,10 @@
       </p:grpSpPr>
       <p:pic>
         <p:nvPicPr>
-          <p:cNvPr id="5" name="Picture 4" descr="A picture containing screenshot, darkness, space, blur">
-            <a:extLst>
-              <a:ext uri="{FF2B5EF4-FFF2-40B4-BE49-F238E27FC236}">
-                <a16:creationId xmlns:a16="http://schemas.microsoft.com/office/drawing/2014/main" id="{EB162CD2-A3D4-C190-66EC-77264E45DAA3}"/>
+          <p:cNvPr id="6" name="Picture 5" descr="A logo with a star and wings&#10;&#10;Description automatically generated with low confidence">
+            <a:extLst>
+              <a:ext uri="{FF2B5EF4-FFF2-40B4-BE49-F238E27FC236}">
+                <a16:creationId xmlns:a16="http://schemas.microsoft.com/office/drawing/2014/main" id="{F4C3D4ED-3486-B701-4B5D-096DBB6C3B32}"/>
               </a:ext>
             </a:extLst>
           </p:cNvPr>
@@ -6885,42 +6401,6 @@
         </p:nvPicPr>
         <p:blipFill>
           <a:blip r:embed="rId2" cstate="print">
-            <a:extLst>
-              <a:ext uri="{28A0092B-C50C-407E-A947-70E740481C1C}">
-                <a14:useLocalDpi xmlns:a14="http://schemas.microsoft.com/office/drawing/2010/main" val="0"/>
-              </a:ext>
-            </a:extLst>
-          </a:blip>
-          <a:stretch>
-            <a:fillRect/>
-          </a:stretch>
-        </p:blipFill>
-        <p:spPr>
-          <a:xfrm>
-            <a:off x="-64169" y="-64168"/>
-            <a:ext cx="12304295" cy="6978316"/>
-          </a:xfrm>
-          <a:prstGeom prst="rect">
-            <a:avLst/>
-          </a:prstGeom>
-        </p:spPr>
-      </p:pic>
-      <p:pic>
-        <p:nvPicPr>
-          <p:cNvPr id="6" name="Picture 5" descr="A logo with a star and wings&#10;&#10;Description automatically generated with low confidence">
-            <a:extLst>
-              <a:ext uri="{FF2B5EF4-FFF2-40B4-BE49-F238E27FC236}">
-                <a16:creationId xmlns:a16="http://schemas.microsoft.com/office/drawing/2014/main" id="{F4C3D4ED-3486-B701-4B5D-096DBB6C3B32}"/>
-              </a:ext>
-            </a:extLst>
-          </p:cNvPr>
-          <p:cNvPicPr>
-            <a:picLocks noChangeAspect="1"/>
-          </p:cNvPicPr>
-          <p:nvPr/>
-        </p:nvPicPr>
-        <p:blipFill>
-          <a:blip r:embed="rId3" cstate="print">
             <a:extLst>
               <a:ext uri="{28A0092B-C50C-407E-A947-70E740481C1C}">
                 <a14:useLocalDpi xmlns:a14="http://schemas.microsoft.com/office/drawing/2010/main" val="0"/>
@@ -7087,7 +6567,7 @@
           <p:nvPr/>
         </p:nvPicPr>
         <p:blipFill>
-          <a:blip r:embed="rId4"/>
+          <a:blip r:embed="rId3"/>
           <a:stretch>
             <a:fillRect/>
           </a:stretch>
@@ -7152,10 +6632,10 @@
       </p:grpSpPr>
       <p:pic>
         <p:nvPicPr>
-          <p:cNvPr id="5" name="Picture 4" descr="A picture containing screenshot, darkness, space, blur">
-            <a:extLst>
-              <a:ext uri="{FF2B5EF4-FFF2-40B4-BE49-F238E27FC236}">
-                <a16:creationId xmlns:a16="http://schemas.microsoft.com/office/drawing/2014/main" id="{ACEA7783-6937-F1A5-B6C3-7D35EE806907}"/>
+          <p:cNvPr id="6" name="Picture 5" descr="A logo with a star and wings&#10;&#10;Description automatically generated with low confidence">
+            <a:extLst>
+              <a:ext uri="{FF2B5EF4-FFF2-40B4-BE49-F238E27FC236}">
+                <a16:creationId xmlns:a16="http://schemas.microsoft.com/office/drawing/2014/main" id="{3A60D5D4-383B-1E22-BB48-4B4FF11F4897}"/>
               </a:ext>
             </a:extLst>
           </p:cNvPr>
@@ -7166,42 +6646,6 @@
         </p:nvPicPr>
         <p:blipFill>
           <a:blip r:embed="rId2" cstate="print">
-            <a:extLst>
-              <a:ext uri="{28A0092B-C50C-407E-A947-70E740481C1C}">
-                <a14:useLocalDpi xmlns:a14="http://schemas.microsoft.com/office/drawing/2010/main" val="0"/>
-              </a:ext>
-            </a:extLst>
-          </a:blip>
-          <a:stretch>
-            <a:fillRect/>
-          </a:stretch>
-        </p:blipFill>
-        <p:spPr>
-          <a:xfrm>
-            <a:off x="-64169" y="-64168"/>
-            <a:ext cx="12304295" cy="6978316"/>
-          </a:xfrm>
-          <a:prstGeom prst="rect">
-            <a:avLst/>
-          </a:prstGeom>
-        </p:spPr>
-      </p:pic>
-      <p:pic>
-        <p:nvPicPr>
-          <p:cNvPr id="6" name="Picture 5" descr="A logo with a star and wings&#10;&#10;Description automatically generated with low confidence">
-            <a:extLst>
-              <a:ext uri="{FF2B5EF4-FFF2-40B4-BE49-F238E27FC236}">
-                <a16:creationId xmlns:a16="http://schemas.microsoft.com/office/drawing/2014/main" id="{3A60D5D4-383B-1E22-BB48-4B4FF11F4897}"/>
-              </a:ext>
-            </a:extLst>
-          </p:cNvPr>
-          <p:cNvPicPr>
-            <a:picLocks noChangeAspect="1"/>
-          </p:cNvPicPr>
-          <p:nvPr/>
-        </p:nvPicPr>
-        <p:blipFill>
-          <a:blip r:embed="rId3" cstate="print">
             <a:extLst>
               <a:ext uri="{28A0092B-C50C-407E-A947-70E740481C1C}">
                 <a14:useLocalDpi xmlns:a14="http://schemas.microsoft.com/office/drawing/2010/main" val="0"/>
@@ -7434,10 +6878,10 @@
       </p:grpSpPr>
       <p:pic>
         <p:nvPicPr>
-          <p:cNvPr id="5" name="Picture 4" descr="A picture containing screenshot, darkness, space, blur">
-            <a:extLst>
-              <a:ext uri="{FF2B5EF4-FFF2-40B4-BE49-F238E27FC236}">
-                <a16:creationId xmlns:a16="http://schemas.microsoft.com/office/drawing/2014/main" id="{76FF4702-149B-CF17-F20E-1B22F35358EA}"/>
+          <p:cNvPr id="6" name="Picture 5" descr="A logo with a star and wings&#10;&#10;Description automatically generated with low confidence">
+            <a:extLst>
+              <a:ext uri="{FF2B5EF4-FFF2-40B4-BE49-F238E27FC236}">
+                <a16:creationId xmlns:a16="http://schemas.microsoft.com/office/drawing/2014/main" id="{0967ED50-D307-586E-F98B-5BCA2A66085D}"/>
               </a:ext>
             </a:extLst>
           </p:cNvPr>
@@ -7448,42 +6892,6 @@
         </p:nvPicPr>
         <p:blipFill>
           <a:blip r:embed="rId2" cstate="print">
-            <a:extLst>
-              <a:ext uri="{28A0092B-C50C-407E-A947-70E740481C1C}">
-                <a14:useLocalDpi xmlns:a14="http://schemas.microsoft.com/office/drawing/2010/main" val="0"/>
-              </a:ext>
-            </a:extLst>
-          </a:blip>
-          <a:stretch>
-            <a:fillRect/>
-          </a:stretch>
-        </p:blipFill>
-        <p:spPr>
-          <a:xfrm>
-            <a:off x="-64169" y="-64168"/>
-            <a:ext cx="12304295" cy="6978316"/>
-          </a:xfrm>
-          <a:prstGeom prst="rect">
-            <a:avLst/>
-          </a:prstGeom>
-        </p:spPr>
-      </p:pic>
-      <p:pic>
-        <p:nvPicPr>
-          <p:cNvPr id="6" name="Picture 5" descr="A logo with a star and wings&#10;&#10;Description automatically generated with low confidence">
-            <a:extLst>
-              <a:ext uri="{FF2B5EF4-FFF2-40B4-BE49-F238E27FC236}">
-                <a16:creationId xmlns:a16="http://schemas.microsoft.com/office/drawing/2014/main" id="{0967ED50-D307-586E-F98B-5BCA2A66085D}"/>
-              </a:ext>
-            </a:extLst>
-          </p:cNvPr>
-          <p:cNvPicPr>
-            <a:picLocks noChangeAspect="1"/>
-          </p:cNvPicPr>
-          <p:nvPr/>
-        </p:nvPicPr>
-        <p:blipFill>
-          <a:blip r:embed="rId3" cstate="print">
             <a:extLst>
               <a:ext uri="{28A0092B-C50C-407E-A947-70E740481C1C}">
                 <a14:useLocalDpi xmlns:a14="http://schemas.microsoft.com/office/drawing/2010/main" val="0"/>
@@ -7638,7 +7046,7 @@
         <p:spPr>
           <a:xfrm>
             <a:off x="0" y="2623581"/>
-            <a:ext cx="9709356" cy="2554545"/>
+            <a:ext cx="9709356" cy="3046988"/>
           </a:xfrm>
           <a:prstGeom prst="rect">
             <a:avLst/>
@@ -7711,6 +7119,27 @@
               </a:rPr>
               <a:t>Example: day =29 ;month =2; year=2023; -&gt;invalid</a:t>
             </a:r>
+          </a:p>
+          <a:p>
+            <a:pPr marL="457200" indent="-457200">
+              <a:buFont typeface="Arial" panose="020B0604020202020204" pitchFamily="34" charset="0"/>
+              <a:buChar char="•"/>
+              <a:defRPr/>
+            </a:pPr>
+            <a:r>
+              <a:rPr lang="en-US" sz="3200" b="1" dirty="0">
+                <a:solidFill>
+                  <a:prstClr val="white"/>
+                </a:solidFill>
+              </a:rPr>
+              <a:t>Example: day =31 ;month =6; year=2023; -&gt;invalid</a:t>
+            </a:r>
+            <a:endParaRPr lang="en-US" sz="3200" b="1" dirty="0">
+              <a:solidFill>
+                <a:prstClr val="white"/>
+              </a:solidFill>
+              <a:latin typeface="Aptos" panose="02110004020202020204"/>
+            </a:endParaRPr>
           </a:p>
           <a:p>
             <a:pPr marL="457200" lvl="0" indent="-457200">
@@ -7825,10 +7254,10 @@
       </p:grpSpPr>
       <p:pic>
         <p:nvPicPr>
-          <p:cNvPr id="5" name="Picture 4" descr="A picture containing screenshot, darkness, space, blur">
-            <a:extLst>
-              <a:ext uri="{FF2B5EF4-FFF2-40B4-BE49-F238E27FC236}">
-                <a16:creationId xmlns:a16="http://schemas.microsoft.com/office/drawing/2014/main" id="{79D7607C-BA81-7F18-A4A8-168488D310C6}"/>
+          <p:cNvPr id="6" name="Picture 5" descr="A logo with a star and wings&#10;&#10;Description automatically generated with low confidence">
+            <a:extLst>
+              <a:ext uri="{FF2B5EF4-FFF2-40B4-BE49-F238E27FC236}">
+                <a16:creationId xmlns:a16="http://schemas.microsoft.com/office/drawing/2014/main" id="{6BF995F3-45C9-C223-F559-C14AF5D92A8E}"/>
               </a:ext>
             </a:extLst>
           </p:cNvPr>
@@ -7839,42 +7268,6 @@
         </p:nvPicPr>
         <p:blipFill>
           <a:blip r:embed="rId2" cstate="print">
-            <a:extLst>
-              <a:ext uri="{28A0092B-C50C-407E-A947-70E740481C1C}">
-                <a14:useLocalDpi xmlns:a14="http://schemas.microsoft.com/office/drawing/2010/main" val="0"/>
-              </a:ext>
-            </a:extLst>
-          </a:blip>
-          <a:stretch>
-            <a:fillRect/>
-          </a:stretch>
-        </p:blipFill>
-        <p:spPr>
-          <a:xfrm>
-            <a:off x="-64169" y="-64168"/>
-            <a:ext cx="12304295" cy="6978316"/>
-          </a:xfrm>
-          <a:prstGeom prst="rect">
-            <a:avLst/>
-          </a:prstGeom>
-        </p:spPr>
-      </p:pic>
-      <p:pic>
-        <p:nvPicPr>
-          <p:cNvPr id="6" name="Picture 5" descr="A logo with a star and wings&#10;&#10;Description automatically generated with low confidence">
-            <a:extLst>
-              <a:ext uri="{FF2B5EF4-FFF2-40B4-BE49-F238E27FC236}">
-                <a16:creationId xmlns:a16="http://schemas.microsoft.com/office/drawing/2014/main" id="{6BF995F3-45C9-C223-F559-C14AF5D92A8E}"/>
-              </a:ext>
-            </a:extLst>
-          </p:cNvPr>
-          <p:cNvPicPr>
-            <a:picLocks noChangeAspect="1"/>
-          </p:cNvPicPr>
-          <p:nvPr/>
-        </p:nvPicPr>
-        <p:blipFill>
-          <a:blip r:embed="rId3" cstate="print">
             <a:extLst>
               <a:ext uri="{28A0092B-C50C-407E-A947-70E740481C1C}">
                 <a14:useLocalDpi xmlns:a14="http://schemas.microsoft.com/office/drawing/2010/main" val="0"/>
@@ -8126,10 +7519,10 @@
       </p:grpSpPr>
       <p:pic>
         <p:nvPicPr>
-          <p:cNvPr id="5" name="Picture 4" descr="A picture containing screenshot, darkness, space, blur">
-            <a:extLst>
-              <a:ext uri="{FF2B5EF4-FFF2-40B4-BE49-F238E27FC236}">
-                <a16:creationId xmlns:a16="http://schemas.microsoft.com/office/drawing/2014/main" id="{95B724F0-DF86-9009-3166-3F0C4D6B6743}"/>
+          <p:cNvPr id="6" name="Picture 5" descr="A logo with a star and wings&#10;&#10;Description automatically generated with low confidence">
+            <a:extLst>
+              <a:ext uri="{FF2B5EF4-FFF2-40B4-BE49-F238E27FC236}">
+                <a16:creationId xmlns:a16="http://schemas.microsoft.com/office/drawing/2014/main" id="{34E76170-9A8D-9055-BB60-C18C3B5E7440}"/>
               </a:ext>
             </a:extLst>
           </p:cNvPr>
@@ -8140,42 +7533,6 @@
         </p:nvPicPr>
         <p:blipFill>
           <a:blip r:embed="rId2" cstate="print">
-            <a:extLst>
-              <a:ext uri="{28A0092B-C50C-407E-A947-70E740481C1C}">
-                <a14:useLocalDpi xmlns:a14="http://schemas.microsoft.com/office/drawing/2010/main" val="0"/>
-              </a:ext>
-            </a:extLst>
-          </a:blip>
-          <a:stretch>
-            <a:fillRect/>
-          </a:stretch>
-        </p:blipFill>
-        <p:spPr>
-          <a:xfrm>
-            <a:off x="-64169" y="-64168"/>
-            <a:ext cx="12304295" cy="6978316"/>
-          </a:xfrm>
-          <a:prstGeom prst="rect">
-            <a:avLst/>
-          </a:prstGeom>
-        </p:spPr>
-      </p:pic>
-      <p:pic>
-        <p:nvPicPr>
-          <p:cNvPr id="6" name="Picture 5" descr="A logo with a star and wings&#10;&#10;Description automatically generated with low confidence">
-            <a:extLst>
-              <a:ext uri="{FF2B5EF4-FFF2-40B4-BE49-F238E27FC236}">
-                <a16:creationId xmlns:a16="http://schemas.microsoft.com/office/drawing/2014/main" id="{34E76170-9A8D-9055-BB60-C18C3B5E7440}"/>
-              </a:ext>
-            </a:extLst>
-          </p:cNvPr>
-          <p:cNvPicPr>
-            <a:picLocks noChangeAspect="1"/>
-          </p:cNvPicPr>
-          <p:nvPr/>
-        </p:nvPicPr>
-        <p:blipFill>
-          <a:blip r:embed="rId3" cstate="print">
             <a:extLst>
               <a:ext uri="{28A0092B-C50C-407E-A947-70E740481C1C}">
                 <a14:useLocalDpi xmlns:a14="http://schemas.microsoft.com/office/drawing/2010/main" val="0"/>
@@ -8392,7 +7749,7 @@
           <p:nvPr/>
         </p:nvPicPr>
         <p:blipFill>
-          <a:blip r:embed="rId4"/>
+          <a:blip r:embed="rId3"/>
           <a:stretch>
             <a:fillRect/>
           </a:stretch>
@@ -8457,10 +7814,10 @@
       </p:grpSpPr>
       <p:pic>
         <p:nvPicPr>
-          <p:cNvPr id="5" name="Picture 4" descr="A picture containing screenshot, darkness, space, blur">
-            <a:extLst>
-              <a:ext uri="{FF2B5EF4-FFF2-40B4-BE49-F238E27FC236}">
-                <a16:creationId xmlns:a16="http://schemas.microsoft.com/office/drawing/2014/main" id="{65B6A5DB-CD73-8E7B-54B1-068BD52030F2}"/>
+          <p:cNvPr id="6" name="Picture 5" descr="A logo with a star and wings&#10;&#10;Description automatically generated with low confidence">
+            <a:extLst>
+              <a:ext uri="{FF2B5EF4-FFF2-40B4-BE49-F238E27FC236}">
+                <a16:creationId xmlns:a16="http://schemas.microsoft.com/office/drawing/2014/main" id="{709224E7-DC9F-52B0-7643-14EACF5D714F}"/>
               </a:ext>
             </a:extLst>
           </p:cNvPr>
@@ -8471,42 +7828,6 @@
         </p:nvPicPr>
         <p:blipFill>
           <a:blip r:embed="rId2" cstate="print">
-            <a:extLst>
-              <a:ext uri="{28A0092B-C50C-407E-A947-70E740481C1C}">
-                <a14:useLocalDpi xmlns:a14="http://schemas.microsoft.com/office/drawing/2010/main" val="0"/>
-              </a:ext>
-            </a:extLst>
-          </a:blip>
-          <a:stretch>
-            <a:fillRect/>
-          </a:stretch>
-        </p:blipFill>
-        <p:spPr>
-          <a:xfrm>
-            <a:off x="-64169" y="-64168"/>
-            <a:ext cx="12304295" cy="6978316"/>
-          </a:xfrm>
-          <a:prstGeom prst="rect">
-            <a:avLst/>
-          </a:prstGeom>
-        </p:spPr>
-      </p:pic>
-      <p:pic>
-        <p:nvPicPr>
-          <p:cNvPr id="6" name="Picture 5" descr="A logo with a star and wings&#10;&#10;Description automatically generated with low confidence">
-            <a:extLst>
-              <a:ext uri="{FF2B5EF4-FFF2-40B4-BE49-F238E27FC236}">
-                <a16:creationId xmlns:a16="http://schemas.microsoft.com/office/drawing/2014/main" id="{709224E7-DC9F-52B0-7643-14EACF5D714F}"/>
-              </a:ext>
-            </a:extLst>
-          </p:cNvPr>
-          <p:cNvPicPr>
-            <a:picLocks noChangeAspect="1"/>
-          </p:cNvPicPr>
-          <p:nvPr/>
-        </p:nvPicPr>
-        <p:blipFill>
-          <a:blip r:embed="rId3" cstate="print">
             <a:extLst>
               <a:ext uri="{28A0092B-C50C-407E-A947-70E740481C1C}">
                 <a14:useLocalDpi xmlns:a14="http://schemas.microsoft.com/office/drawing/2010/main" val="0"/>
@@ -8635,10 +7956,10 @@
       </p:grpSpPr>
       <p:pic>
         <p:nvPicPr>
-          <p:cNvPr id="5" name="Picture 4" descr="A picture containing screenshot, darkness, space, blur">
-            <a:extLst>
-              <a:ext uri="{FF2B5EF4-FFF2-40B4-BE49-F238E27FC236}">
-                <a16:creationId xmlns:a16="http://schemas.microsoft.com/office/drawing/2014/main" id="{E9BEF2D8-8A81-6189-2944-388146991524}"/>
+          <p:cNvPr id="6" name="Picture 5" descr="A logo with a star and wings&#10;&#10;Description automatically generated with low confidence">
+            <a:extLst>
+              <a:ext uri="{FF2B5EF4-FFF2-40B4-BE49-F238E27FC236}">
+                <a16:creationId xmlns:a16="http://schemas.microsoft.com/office/drawing/2014/main" id="{35D0656A-D9EC-6E0B-930A-CF52EF5581D7}"/>
               </a:ext>
             </a:extLst>
           </p:cNvPr>
@@ -8661,42 +7982,6 @@
         </p:blipFill>
         <p:spPr>
           <a:xfrm>
-            <a:off x="-64169" y="-64168"/>
-            <a:ext cx="12304295" cy="6978316"/>
-          </a:xfrm>
-          <a:prstGeom prst="rect">
-            <a:avLst/>
-          </a:prstGeom>
-        </p:spPr>
-      </p:pic>
-      <p:pic>
-        <p:nvPicPr>
-          <p:cNvPr id="6" name="Picture 5" descr="A logo with a star and wings&#10;&#10;Description automatically generated with low confidence">
-            <a:extLst>
-              <a:ext uri="{FF2B5EF4-FFF2-40B4-BE49-F238E27FC236}">
-                <a16:creationId xmlns:a16="http://schemas.microsoft.com/office/drawing/2014/main" id="{35D0656A-D9EC-6E0B-930A-CF52EF5581D7}"/>
-              </a:ext>
-            </a:extLst>
-          </p:cNvPr>
-          <p:cNvPicPr>
-            <a:picLocks noChangeAspect="1"/>
-          </p:cNvPicPr>
-          <p:nvPr/>
-        </p:nvPicPr>
-        <p:blipFill>
-          <a:blip r:embed="rId3" cstate="print">
-            <a:extLst>
-              <a:ext uri="{28A0092B-C50C-407E-A947-70E740481C1C}">
-                <a14:useLocalDpi xmlns:a14="http://schemas.microsoft.com/office/drawing/2010/main" val="0"/>
-              </a:ext>
-            </a:extLst>
-          </a:blip>
-          <a:stretch>
-            <a:fillRect/>
-          </a:stretch>
-        </p:blipFill>
-        <p:spPr>
-          <a:xfrm>
             <a:off x="5369985" y="6050010"/>
             <a:ext cx="1452029" cy="677399"/>
           </a:xfrm>
@@ -8720,7 +8005,7 @@
           <p:nvPr/>
         </p:nvPicPr>
         <p:blipFill>
-          <a:blip r:embed="rId4">
+          <a:blip r:embed="rId3">
             <a:extLst>
               <a:ext uri="{28A0092B-C50C-407E-A947-70E740481C1C}">
                 <a14:useLocalDpi xmlns:a14="http://schemas.microsoft.com/office/drawing/2010/main" val="0"/>
@@ -8832,10 +8117,10 @@
       </p:grpSpPr>
       <p:pic>
         <p:nvPicPr>
-          <p:cNvPr id="5" name="Picture 4" descr="A picture containing screenshot, darkness, space, blur">
-            <a:extLst>
-              <a:ext uri="{FF2B5EF4-FFF2-40B4-BE49-F238E27FC236}">
-                <a16:creationId xmlns:a16="http://schemas.microsoft.com/office/drawing/2014/main" id="{AE8E2E00-7DAC-21CB-185D-DE0468BDE1BF}"/>
+          <p:cNvPr id="6" name="Picture 5" descr="A logo with a star and wings&#10;&#10;Description automatically generated with low confidence">
+            <a:extLst>
+              <a:ext uri="{FF2B5EF4-FFF2-40B4-BE49-F238E27FC236}">
+                <a16:creationId xmlns:a16="http://schemas.microsoft.com/office/drawing/2014/main" id="{1C9769AD-75E1-89C8-CF2D-8CF8385B9711}"/>
               </a:ext>
             </a:extLst>
           </p:cNvPr>
@@ -8846,42 +8131,6 @@
         </p:nvPicPr>
         <p:blipFill>
           <a:blip r:embed="rId2" cstate="print">
-            <a:extLst>
-              <a:ext uri="{28A0092B-C50C-407E-A947-70E740481C1C}">
-                <a14:useLocalDpi xmlns:a14="http://schemas.microsoft.com/office/drawing/2010/main" val="0"/>
-              </a:ext>
-            </a:extLst>
-          </a:blip>
-          <a:stretch>
-            <a:fillRect/>
-          </a:stretch>
-        </p:blipFill>
-        <p:spPr>
-          <a:xfrm>
-            <a:off x="-64169" y="-64168"/>
-            <a:ext cx="12304295" cy="6978316"/>
-          </a:xfrm>
-          <a:prstGeom prst="rect">
-            <a:avLst/>
-          </a:prstGeom>
-        </p:spPr>
-      </p:pic>
-      <p:pic>
-        <p:nvPicPr>
-          <p:cNvPr id="6" name="Picture 5" descr="A logo with a star and wings&#10;&#10;Description automatically generated with low confidence">
-            <a:extLst>
-              <a:ext uri="{FF2B5EF4-FFF2-40B4-BE49-F238E27FC236}">
-                <a16:creationId xmlns:a16="http://schemas.microsoft.com/office/drawing/2014/main" id="{1C9769AD-75E1-89C8-CF2D-8CF8385B9711}"/>
-              </a:ext>
-            </a:extLst>
-          </p:cNvPr>
-          <p:cNvPicPr>
-            <a:picLocks noChangeAspect="1"/>
-          </p:cNvPicPr>
-          <p:nvPr/>
-        </p:nvPicPr>
-        <p:blipFill>
-          <a:blip r:embed="rId3" cstate="print">
             <a:extLst>
               <a:ext uri="{28A0092B-C50C-407E-A947-70E740481C1C}">
                 <a14:useLocalDpi xmlns:a14="http://schemas.microsoft.com/office/drawing/2010/main" val="0"/>
@@ -9040,7 +8289,7 @@
           <p:nvPr/>
         </p:nvPicPr>
         <p:blipFill>
-          <a:blip r:embed="rId4">
+          <a:blip r:embed="rId3">
             <a:extLst>
               <a:ext uri="{28A0092B-C50C-407E-A947-70E740481C1C}">
                 <a14:useLocalDpi xmlns:a14="http://schemas.microsoft.com/office/drawing/2010/main" val="0"/>
@@ -9111,10 +8360,10 @@
       </p:grpSpPr>
       <p:pic>
         <p:nvPicPr>
-          <p:cNvPr id="5" name="Picture 4" descr="A picture containing screenshot, darkness, space, blur">
-            <a:extLst>
-              <a:ext uri="{FF2B5EF4-FFF2-40B4-BE49-F238E27FC236}">
-                <a16:creationId xmlns:a16="http://schemas.microsoft.com/office/drawing/2014/main" id="{60FBDC89-F7B6-A808-9206-16AE787FF5E3}"/>
+          <p:cNvPr id="6" name="Picture 5" descr="A logo with a star and wings&#10;&#10;Description automatically generated with low confidence">
+            <a:extLst>
+              <a:ext uri="{FF2B5EF4-FFF2-40B4-BE49-F238E27FC236}">
+                <a16:creationId xmlns:a16="http://schemas.microsoft.com/office/drawing/2014/main" id="{38B27BC9-6CA8-0E57-D1E7-0AE632651232}"/>
               </a:ext>
             </a:extLst>
           </p:cNvPr>
@@ -9125,42 +8374,6 @@
         </p:nvPicPr>
         <p:blipFill>
           <a:blip r:embed="rId2" cstate="print">
-            <a:extLst>
-              <a:ext uri="{28A0092B-C50C-407E-A947-70E740481C1C}">
-                <a14:useLocalDpi xmlns:a14="http://schemas.microsoft.com/office/drawing/2010/main" val="0"/>
-              </a:ext>
-            </a:extLst>
-          </a:blip>
-          <a:stretch>
-            <a:fillRect/>
-          </a:stretch>
-        </p:blipFill>
-        <p:spPr>
-          <a:xfrm>
-            <a:off x="-64169" y="-64168"/>
-            <a:ext cx="12304295" cy="6978316"/>
-          </a:xfrm>
-          <a:prstGeom prst="rect">
-            <a:avLst/>
-          </a:prstGeom>
-        </p:spPr>
-      </p:pic>
-      <p:pic>
-        <p:nvPicPr>
-          <p:cNvPr id="6" name="Picture 5" descr="A logo with a star and wings&#10;&#10;Description automatically generated with low confidence">
-            <a:extLst>
-              <a:ext uri="{FF2B5EF4-FFF2-40B4-BE49-F238E27FC236}">
-                <a16:creationId xmlns:a16="http://schemas.microsoft.com/office/drawing/2014/main" id="{38B27BC9-6CA8-0E57-D1E7-0AE632651232}"/>
-              </a:ext>
-            </a:extLst>
-          </p:cNvPr>
-          <p:cNvPicPr>
-            <a:picLocks noChangeAspect="1"/>
-          </p:cNvPicPr>
-          <p:nvPr/>
-        </p:nvPicPr>
-        <p:blipFill>
-          <a:blip r:embed="rId3" cstate="print">
             <a:extLst>
               <a:ext uri="{28A0092B-C50C-407E-A947-70E740481C1C}">
                 <a14:useLocalDpi xmlns:a14="http://schemas.microsoft.com/office/drawing/2010/main" val="0"/>
@@ -9319,7 +8532,7 @@
           <p:nvPr/>
         </p:nvPicPr>
         <p:blipFill>
-          <a:blip r:embed="rId4">
+          <a:blip r:embed="rId3">
             <a:extLst>
               <a:ext uri="{28A0092B-C50C-407E-A947-70E740481C1C}">
                 <a14:useLocalDpi xmlns:a14="http://schemas.microsoft.com/office/drawing/2010/main" val="0"/>
@@ -9421,10 +8634,10 @@
       </p:grpSpPr>
       <p:pic>
         <p:nvPicPr>
-          <p:cNvPr id="5" name="Picture 4" descr="A picture containing screenshot, darkness, space, blur">
-            <a:extLst>
-              <a:ext uri="{FF2B5EF4-FFF2-40B4-BE49-F238E27FC236}">
-                <a16:creationId xmlns:a16="http://schemas.microsoft.com/office/drawing/2014/main" id="{AF90AFD7-1DDE-5D89-2B44-5EFFD4CAB351}"/>
+          <p:cNvPr id="6" name="Picture 5" descr="A logo with a star and wings&#10;&#10;Description automatically generated with low confidence">
+            <a:extLst>
+              <a:ext uri="{FF2B5EF4-FFF2-40B4-BE49-F238E27FC236}">
+                <a16:creationId xmlns:a16="http://schemas.microsoft.com/office/drawing/2014/main" id="{A202A573-3327-9FEA-04E9-2B8B0646F967}"/>
               </a:ext>
             </a:extLst>
           </p:cNvPr>
@@ -9435,42 +8648,6 @@
         </p:nvPicPr>
         <p:blipFill>
           <a:blip r:embed="rId2" cstate="print">
-            <a:extLst>
-              <a:ext uri="{28A0092B-C50C-407E-A947-70E740481C1C}">
-                <a14:useLocalDpi xmlns:a14="http://schemas.microsoft.com/office/drawing/2010/main" val="0"/>
-              </a:ext>
-            </a:extLst>
-          </a:blip>
-          <a:stretch>
-            <a:fillRect/>
-          </a:stretch>
-        </p:blipFill>
-        <p:spPr>
-          <a:xfrm>
-            <a:off x="-64169" y="-64168"/>
-            <a:ext cx="12304295" cy="6978316"/>
-          </a:xfrm>
-          <a:prstGeom prst="rect">
-            <a:avLst/>
-          </a:prstGeom>
-        </p:spPr>
-      </p:pic>
-      <p:pic>
-        <p:nvPicPr>
-          <p:cNvPr id="6" name="Picture 5" descr="A logo with a star and wings&#10;&#10;Description automatically generated with low confidence">
-            <a:extLst>
-              <a:ext uri="{FF2B5EF4-FFF2-40B4-BE49-F238E27FC236}">
-                <a16:creationId xmlns:a16="http://schemas.microsoft.com/office/drawing/2014/main" id="{A202A573-3327-9FEA-04E9-2B8B0646F967}"/>
-              </a:ext>
-            </a:extLst>
-          </p:cNvPr>
-          <p:cNvPicPr>
-            <a:picLocks noChangeAspect="1"/>
-          </p:cNvPicPr>
-          <p:nvPr/>
-        </p:nvPicPr>
-        <p:blipFill>
-          <a:blip r:embed="rId3" cstate="print">
             <a:extLst>
               <a:ext uri="{28A0092B-C50C-407E-A947-70E740481C1C}">
                 <a14:useLocalDpi xmlns:a14="http://schemas.microsoft.com/office/drawing/2010/main" val="0"/>
@@ -9629,7 +8806,7 @@
           <p:nvPr/>
         </p:nvPicPr>
         <p:blipFill>
-          <a:blip r:embed="rId4"/>
+          <a:blip r:embed="rId3"/>
           <a:stretch>
             <a:fillRect/>
           </a:stretch>
@@ -9694,10 +8871,10 @@
       </p:grpSpPr>
       <p:pic>
         <p:nvPicPr>
-          <p:cNvPr id="5" name="Picture 4" descr="A picture containing screenshot, darkness, space, blur">
-            <a:extLst>
-              <a:ext uri="{FF2B5EF4-FFF2-40B4-BE49-F238E27FC236}">
-                <a16:creationId xmlns:a16="http://schemas.microsoft.com/office/drawing/2014/main" id="{AFE9EB21-A750-996B-69E4-E3C4C8FBA67A}"/>
+          <p:cNvPr id="6" name="Picture 5" descr="A logo with a star and wings&#10;&#10;Description automatically generated with low confidence">
+            <a:extLst>
+              <a:ext uri="{FF2B5EF4-FFF2-40B4-BE49-F238E27FC236}">
+                <a16:creationId xmlns:a16="http://schemas.microsoft.com/office/drawing/2014/main" id="{A5F7A0E6-4693-47FC-ADF0-82BA412A08D0}"/>
               </a:ext>
             </a:extLst>
           </p:cNvPr>
@@ -9708,42 +8885,6 @@
         </p:nvPicPr>
         <p:blipFill>
           <a:blip r:embed="rId2" cstate="print">
-            <a:extLst>
-              <a:ext uri="{28A0092B-C50C-407E-A947-70E740481C1C}">
-                <a14:useLocalDpi xmlns:a14="http://schemas.microsoft.com/office/drawing/2010/main" val="0"/>
-              </a:ext>
-            </a:extLst>
-          </a:blip>
-          <a:stretch>
-            <a:fillRect/>
-          </a:stretch>
-        </p:blipFill>
-        <p:spPr>
-          <a:xfrm>
-            <a:off x="-64169" y="-64168"/>
-            <a:ext cx="12304295" cy="6978316"/>
-          </a:xfrm>
-          <a:prstGeom prst="rect">
-            <a:avLst/>
-          </a:prstGeom>
-        </p:spPr>
-      </p:pic>
-      <p:pic>
-        <p:nvPicPr>
-          <p:cNvPr id="6" name="Picture 5" descr="A logo with a star and wings&#10;&#10;Description automatically generated with low confidence">
-            <a:extLst>
-              <a:ext uri="{FF2B5EF4-FFF2-40B4-BE49-F238E27FC236}">
-                <a16:creationId xmlns:a16="http://schemas.microsoft.com/office/drawing/2014/main" id="{A5F7A0E6-4693-47FC-ADF0-82BA412A08D0}"/>
-              </a:ext>
-            </a:extLst>
-          </p:cNvPr>
-          <p:cNvPicPr>
-            <a:picLocks noChangeAspect="1"/>
-          </p:cNvPicPr>
-          <p:nvPr/>
-        </p:nvPicPr>
-        <p:blipFill>
-          <a:blip r:embed="rId3" cstate="print">
             <a:extLst>
               <a:ext uri="{28A0092B-C50C-407E-A947-70E740481C1C}">
                 <a14:useLocalDpi xmlns:a14="http://schemas.microsoft.com/office/drawing/2010/main" val="0"/>
@@ -9819,7 +8960,7 @@
           <p:nvPr/>
         </p:nvPicPr>
         <p:blipFill>
-          <a:blip r:embed="rId4">
+          <a:blip r:embed="rId3">
             <a:extLst>
               <a:ext uri="{28A0092B-C50C-407E-A947-70E740481C1C}">
                 <a14:useLocalDpi xmlns:a14="http://schemas.microsoft.com/office/drawing/2010/main" val="0"/>
@@ -9931,10 +9072,10 @@
       </p:grpSpPr>
       <p:pic>
         <p:nvPicPr>
-          <p:cNvPr id="5" name="Picture 4" descr="A picture containing screenshot, darkness, space, blur">
-            <a:extLst>
-              <a:ext uri="{FF2B5EF4-FFF2-40B4-BE49-F238E27FC236}">
-                <a16:creationId xmlns:a16="http://schemas.microsoft.com/office/drawing/2014/main" id="{CF86BFF0-AE88-9A33-CEEB-5FFA40B64CE9}"/>
+          <p:cNvPr id="6" name="Picture 5" descr="A logo with a star and wings&#10;&#10;Description automatically generated with low confidence">
+            <a:extLst>
+              <a:ext uri="{FF2B5EF4-FFF2-40B4-BE49-F238E27FC236}">
+                <a16:creationId xmlns:a16="http://schemas.microsoft.com/office/drawing/2014/main" id="{FE1B5215-6EA4-2909-D641-6F3284761E12}"/>
               </a:ext>
             </a:extLst>
           </p:cNvPr>
@@ -9945,42 +9086,6 @@
         </p:nvPicPr>
         <p:blipFill>
           <a:blip r:embed="rId2" cstate="print">
-            <a:extLst>
-              <a:ext uri="{28A0092B-C50C-407E-A947-70E740481C1C}">
-                <a14:useLocalDpi xmlns:a14="http://schemas.microsoft.com/office/drawing/2010/main" val="0"/>
-              </a:ext>
-            </a:extLst>
-          </a:blip>
-          <a:stretch>
-            <a:fillRect/>
-          </a:stretch>
-        </p:blipFill>
-        <p:spPr>
-          <a:xfrm>
-            <a:off x="-64169" y="-64168"/>
-            <a:ext cx="12304295" cy="6978316"/>
-          </a:xfrm>
-          <a:prstGeom prst="rect">
-            <a:avLst/>
-          </a:prstGeom>
-        </p:spPr>
-      </p:pic>
-      <p:pic>
-        <p:nvPicPr>
-          <p:cNvPr id="6" name="Picture 5" descr="A logo with a star and wings&#10;&#10;Description automatically generated with low confidence">
-            <a:extLst>
-              <a:ext uri="{FF2B5EF4-FFF2-40B4-BE49-F238E27FC236}">
-                <a16:creationId xmlns:a16="http://schemas.microsoft.com/office/drawing/2014/main" id="{FE1B5215-6EA4-2909-D641-6F3284761E12}"/>
-              </a:ext>
-            </a:extLst>
-          </p:cNvPr>
-          <p:cNvPicPr>
-            <a:picLocks noChangeAspect="1"/>
-          </p:cNvPicPr>
-          <p:nvPr/>
-        </p:nvPicPr>
-        <p:blipFill>
-          <a:blip r:embed="rId3" cstate="print">
             <a:extLst>
               <a:ext uri="{28A0092B-C50C-407E-A947-70E740481C1C}">
                 <a14:useLocalDpi xmlns:a14="http://schemas.microsoft.com/office/drawing/2010/main" val="0"/>
@@ -10099,7 +9204,7 @@
         </p:nvSpPr>
         <p:spPr>
           <a:xfrm>
-            <a:off x="0" y="1792585"/>
+            <a:off x="517765" y="1792585"/>
             <a:ext cx="4513007" cy="1938992"/>
           </a:xfrm>
           <a:prstGeom prst="rect">
@@ -10195,7 +9300,7 @@
           <p:nvPr/>
         </p:nvPicPr>
         <p:blipFill>
-          <a:blip r:embed="rId4">
+          <a:blip r:embed="rId3">
             <a:extLst>
               <a:ext uri="{28A0092B-C50C-407E-A947-70E740481C1C}">
                 <a14:useLocalDpi xmlns:a14="http://schemas.microsoft.com/office/drawing/2010/main" val="0"/>
@@ -10266,10 +9371,10 @@
       </p:grpSpPr>
       <p:pic>
         <p:nvPicPr>
-          <p:cNvPr id="5" name="Picture 4" descr="A picture containing screenshot, darkness, space, blur">
-            <a:extLst>
-              <a:ext uri="{FF2B5EF4-FFF2-40B4-BE49-F238E27FC236}">
-                <a16:creationId xmlns:a16="http://schemas.microsoft.com/office/drawing/2014/main" id="{B3145138-F6FB-F2C5-DB87-3A5529014E55}"/>
+          <p:cNvPr id="6" name="Picture 5" descr="A logo with a star and wings&#10;&#10;Description automatically generated with low confidence">
+            <a:extLst>
+              <a:ext uri="{FF2B5EF4-FFF2-40B4-BE49-F238E27FC236}">
+                <a16:creationId xmlns:a16="http://schemas.microsoft.com/office/drawing/2014/main" id="{2A7D88D7-AC9F-9637-97A6-ECC39A414B67}"/>
               </a:ext>
             </a:extLst>
           </p:cNvPr>
@@ -10280,42 +9385,6 @@
         </p:nvPicPr>
         <p:blipFill>
           <a:blip r:embed="rId2" cstate="print">
-            <a:extLst>
-              <a:ext uri="{28A0092B-C50C-407E-A947-70E740481C1C}">
-                <a14:useLocalDpi xmlns:a14="http://schemas.microsoft.com/office/drawing/2010/main" val="0"/>
-              </a:ext>
-            </a:extLst>
-          </a:blip>
-          <a:stretch>
-            <a:fillRect/>
-          </a:stretch>
-        </p:blipFill>
-        <p:spPr>
-          <a:xfrm>
-            <a:off x="-64169" y="-64168"/>
-            <a:ext cx="12304295" cy="6978316"/>
-          </a:xfrm>
-          <a:prstGeom prst="rect">
-            <a:avLst/>
-          </a:prstGeom>
-        </p:spPr>
-      </p:pic>
-      <p:pic>
-        <p:nvPicPr>
-          <p:cNvPr id="6" name="Picture 5" descr="A logo with a star and wings&#10;&#10;Description automatically generated with low confidence">
-            <a:extLst>
-              <a:ext uri="{FF2B5EF4-FFF2-40B4-BE49-F238E27FC236}">
-                <a16:creationId xmlns:a16="http://schemas.microsoft.com/office/drawing/2014/main" id="{2A7D88D7-AC9F-9637-97A6-ECC39A414B67}"/>
-              </a:ext>
-            </a:extLst>
-          </p:cNvPr>
-          <p:cNvPicPr>
-            <a:picLocks noChangeAspect="1"/>
-          </p:cNvPicPr>
-          <p:nvPr/>
-        </p:nvPicPr>
-        <p:blipFill>
-          <a:blip r:embed="rId3" cstate="print">
             <a:extLst>
               <a:ext uri="{28A0092B-C50C-407E-A947-70E740481C1C}">
                 <a14:useLocalDpi xmlns:a14="http://schemas.microsoft.com/office/drawing/2010/main" val="0"/>
@@ -10391,7 +9460,7 @@
           <p:nvPr/>
         </p:nvPicPr>
         <p:blipFill>
-          <a:blip r:embed="rId4">
+          <a:blip r:embed="rId3">
             <a:extLst>
               <a:ext uri="{28A0092B-C50C-407E-A947-70E740481C1C}">
                 <a14:useLocalDpi xmlns:a14="http://schemas.microsoft.com/office/drawing/2010/main" val="0"/>
